--- a/doc/Курсовой проект Презентация.pptx
+++ b/doc/Курсовой проект Презентация.pptx
@@ -266,7 +266,7 @@
             <a:fld id="{1160EA64-D806-43AC-9DF2-F8C432F32B4C}" type="datetimeFigureOut">
               <a:rPr lang="en-US" smtClean="0"/>
               <a:pPr/>
-              <a:t>3/12/2026</a:t>
+              <a:t>6/16/2026</a:t>
             </a:fld>
             <a:endParaRPr lang="en-US" dirty="0"/>
           </a:p>
@@ -436,7 +436,7 @@
             <a:fld id="{E9F9C37B-1D36-470B-8223-D6C91242EC14}" type="datetimeFigureOut">
               <a:rPr lang="en-US" smtClean="0"/>
               <a:pPr/>
-              <a:t>3/12/2026</a:t>
+              <a:t>6/16/2026</a:t>
             </a:fld>
             <a:endParaRPr lang="en-US" dirty="0"/>
           </a:p>
@@ -616,7 +616,7 @@
             <a:fld id="{67C6F52A-A82B-47A2-A83A-8C4C91F2D59F}" type="datetimeFigureOut">
               <a:rPr lang="en-US" smtClean="0"/>
               <a:pPr/>
-              <a:t>3/12/2026</a:t>
+              <a:t>6/16/2026</a:t>
             </a:fld>
             <a:endParaRPr lang="en-US" dirty="0"/>
           </a:p>
@@ -786,7 +786,7 @@
             <a:fld id="{F070A7B3-6521-4DCA-87E5-044747A908C1}" type="datetimeFigureOut">
               <a:rPr lang="en-US" smtClean="0"/>
               <a:pPr/>
-              <a:t>3/12/2026</a:t>
+              <a:t>6/16/2026</a:t>
             </a:fld>
             <a:endParaRPr lang="en-US" dirty="0"/>
           </a:p>
@@ -1033,7 +1033,7 @@
             <a:fld id="{1160EA64-D806-43AC-9DF2-F8C432F32B4C}" type="datetimeFigureOut">
               <a:rPr lang="en-US" smtClean="0"/>
               <a:pPr/>
-              <a:t>3/12/2026</a:t>
+              <a:t>6/16/2026</a:t>
             </a:fld>
             <a:endParaRPr lang="en-US" dirty="0"/>
           </a:p>
@@ -1264,7 +1264,7 @@
             <a:fld id="{AB134690-1557-4C89-A502-4959FE7FAD70}" type="datetimeFigureOut">
               <a:rPr lang="en-US" smtClean="0"/>
               <a:pPr/>
-              <a:t>3/12/2026</a:t>
+              <a:t>6/16/2026</a:t>
             </a:fld>
             <a:endParaRPr lang="en-US" dirty="0"/>
           </a:p>
@@ -1635,7 +1635,7 @@
             <a:fld id="{4F7D4976-E339-4826-83B7-FBD03F55ECF8}" type="datetimeFigureOut">
               <a:rPr lang="en-US" smtClean="0"/>
               <a:pPr/>
-              <a:t>3/12/2026</a:t>
+              <a:t>6/16/2026</a:t>
             </a:fld>
             <a:endParaRPr lang="en-US" dirty="0"/>
           </a:p>
@@ -1759,7 +1759,7 @@
             <a:fld id="{E1037C31-9E7A-4F99-8774-A0E530DE1A42}" type="datetimeFigureOut">
               <a:rPr lang="en-US" smtClean="0"/>
               <a:pPr/>
-              <a:t>3/12/2026</a:t>
+              <a:t>6/16/2026</a:t>
             </a:fld>
             <a:endParaRPr lang="en-US" dirty="0"/>
           </a:p>
@@ -1856,7 +1856,7 @@
             <a:fld id="{C278504F-A551-4DE0-9316-4DCD1D8CC752}" type="datetimeFigureOut">
               <a:rPr lang="en-US" smtClean="0"/>
               <a:pPr/>
-              <a:t>3/12/2026</a:t>
+              <a:t>6/16/2026</a:t>
             </a:fld>
             <a:endParaRPr lang="en-US" dirty="0"/>
           </a:p>
@@ -2133,7 +2133,7 @@
             <a:fld id="{1160EA64-D806-43AC-9DF2-F8C432F32B4C}" type="datetimeFigureOut">
               <a:rPr lang="en-US" smtClean="0"/>
               <a:pPr/>
-              <a:t>3/12/2026</a:t>
+              <a:t>6/16/2026</a:t>
             </a:fld>
             <a:endParaRPr lang="en-US" dirty="0"/>
           </a:p>
@@ -2392,7 +2392,7 @@
             <a:fld id="{1160EA64-D806-43AC-9DF2-F8C432F32B4C}" type="datetimeFigureOut">
               <a:rPr lang="en-US" smtClean="0"/>
               <a:pPr/>
-              <a:t>3/12/2026</a:t>
+              <a:t>6/16/2026</a:t>
             </a:fld>
             <a:endParaRPr lang="en-US" dirty="0"/>
           </a:p>
@@ -2605,7 +2605,7 @@
             <a:fld id="{1160EA64-D806-43AC-9DF2-F8C432F32B4C}" type="datetimeFigureOut">
               <a:rPr lang="en-US" smtClean="0"/>
               <a:pPr/>
-              <a:t>3/12/2026</a:t>
+              <a:t>6/16/2026</a:t>
             </a:fld>
             <a:endParaRPr lang="en-US" dirty="0"/>
           </a:p>
